--- a/decks/geog-landscapes/geog-landscapes_ch3_coastal-landforms.pptx
+++ b/decks/geog-landscapes/geog-landscapes_ch3_coastal-landforms.pptx
@@ -129,30 +129,30 @@
   <p:extLst>
     <p:ext uri="{521415D9-36F7-43E2-AB2F-B90AF26B5E84}">
       <p14:sectionLst xmlns:p14="http://schemas.microsoft.com/office/powerpoint/2010/main">
-        <p14:section name="Opening" id="{41e53504-9b37-7f34-27ae-a2d6501d11bf}">
+        <p14:section name="Opening" id="{47d9c8f2-bef9-1f6a-62b9-a03a94b5a87e}">
           <p14:sldIdLst>
             <p14:sldId id="256"/>
           </p14:sldIdLst>
         </p14:section>
-        <p14:section name="Gate" id="{6506161a-7a19-a39a-0819-aad85cacd93b}">
+        <p14:section name="Gate" id="{2cb2e9ca-a070-4348-17a1-1b15e8e7ded6}">
           <p14:sldIdLst>
             <p14:sldId id="257"/>
             <p14:sldId id="258"/>
           </p14:sldIdLst>
         </p14:section>
-        <p14:section name="Pre-teach" id="{5e94ce49-adb3-e720-4a20-c45d6e1eff13}">
+        <p14:section name="Pre-teach" id="{860c03f6-7ac6-378b-b463-be4d622464ea}">
           <p14:sldIdLst>
             <p14:sldId id="259"/>
             <p14:sldId id="260"/>
           </p14:sldIdLst>
         </p14:section>
-        <p14:section name="Read-along" id="{ee6e88da-1cf0-e886-4691-22639d099b6e}">
+        <p14:section name="Read-along" id="{fe08552d-8344-524e-cc9c-480ce5baa86e}">
           <p14:sldIdLst>
             <p14:sldId id="261"/>
             <p14:sldId id="262"/>
           </p14:sldIdLst>
         </p14:section>
-        <p14:section name="Teach" id="{447e419d-c307-8959-bb3c-209b388f1000}">
+        <p14:section name="Teach" id="{1080dfad-92f6-ce86-627c-172e1726812d}">
           <p14:sldIdLst>
             <p14:sldId id="263"/>
             <p14:sldId id="264"/>
@@ -164,7 +164,7 @@
             <p14:sldId id="270"/>
           </p14:sldIdLst>
         </p14:section>
-        <p14:section name="Routes" id="{5ac728ea-e911-640f-60a8-532deb402c7e}">
+        <p14:section name="Routes" id="{491306f2-57d3-db5b-f003-0ed1d1368d9c}">
           <p14:sldIdLst>
             <p14:sldId id="271"/>
             <p14:sldId id="272"/>
@@ -172,12 +172,12 @@
             <p14:sldId id="274"/>
           </p14:sldIdLst>
         </p14:section>
-        <p14:section name="Close" id="{97a281b6-043d-cf4d-77e6-d2bca53c665c}">
+        <p14:section name="Close" id="{76090fa1-5854-457a-9a46-45071e8c3586}">
           <p14:sldIdLst>
             <p14:sldId id="275"/>
           </p14:sldIdLst>
         </p14:section>
-        <p14:section name="Answers" id="{4e76cb87-37f4-6b2f-d51a-8340b0d52093}">
+        <p14:section name="Answers" id="{a2f59d8a-a5ac-d683-e9b8-75569f84fbaa}">
           <p14:sldIdLst>
             <p14:sldId id="276"/>
             <p14:sldId id="277"/>
@@ -1612,7 +1612,7 @@
             <a:r>
               <a:rPr lang="en-US" dirty="0"/>
               <a:t>Do now — retrieval. Silent, no notes, no help: recall comes before any support. Give about four minutes.
-1. Old Harry Rocks, near Swanage, are a famous UK example of which landform?  →  A   Stacks
+1. Old Harry Rocks, near Swanage, are a famous UK example of which landform?  →  B   Stacks
 2. The Jurassic Coast stretches along the coast of East Devon and Dorset. How long is it, in kilometres?  →  154 km
 3. Marram grass is planted on sand dunes to ___ them.  →  stabilise
 Circulate: who gets 3/3 (Stretch route), 2/3 (Core), 0–1 (Support)? Use this to route pupils later in the lesson.</a:t>
@@ -1705,7 +1705,7 @@
               <a:rPr lang="en-US" dirty="0"/>
               <a:t>Exit ticket — individual, silent, on a slip or mini-whiteboard. Recall before help: no notes, no lanes, no hints. Collect before pupils leave.
 Question: Old Harry Rocks, near Swanage, are a famous UK example of which landform?
-Answer: D   Stacks. Old Harry Rocks are chalk stacks at the tip of The Foreland headland, left standing when arches collapsed.
+Answer: A   Stacks. Old Harry Rocks are chalk stacks at the tip of The Foreland headland, left standing when arches collapsed.
 Source of this question: gate item 1 re-asked (options rotated) — this chapter has no third quick-check module.
 The ebook also holds task 3, "Geology and the shape of a coast", for homework or the next lesson's do now.
 Sort the slips: correct → ready to move on; incorrect → start next lesson in the pre-teach group, with the read-along and the Support lane. Same destination next time.</a:t>
@@ -1979,7 +1979,7 @@
             <a:r>
               <a:rPr lang="en-US" dirty="0"/>
               <a:t>Answers — exit ticket: Exit ticket. Reveal the answer; pupils mark their own work in a different colour, then read the "why" together. Same destination for every lane, so one answer serves the whole class.
-Answer: D   Stacks
+Answer: A   Stacks
 Why: Old Harry Rocks are chalk stacks at the tip of The Foreland headland, left standing when arches collapsed.
 Ask a Support pupil to explain one step, and a Stretch pupil to share their extension.</a:t>
             </a:r>
@@ -2070,7 +2070,7 @@
             <a:r>
               <a:rPr lang="en-US" dirty="0"/>
               <a:t>Answers — pupils mark their own in a different colour, then hands up for 3/3, 2/3, 1/3.
-1. A   Stacks. Old Harry Rocks are chalk stacks at the tip of The Foreland headland, left standing when arches collapsed.
+1. B   Stacks. Old Harry Rocks are chalk stacks at the tip of The Foreland headland, left standing when arches collapsed.
 2. 154 km. The Jurassic Coast is a 154 km stretch of coast that was made a World Heritage Site in 2001.
 3. stabilise. Marram grass is adapted to windy, exposed conditions; its roots bind the sand and stop the wind blowing the dunes away.
 Say the route each score points to: 3/3 Stretch, 2/3 Core, 0–1 Support. Pupils may choose to move up.</a:t>
@@ -11538,7 +11538,7 @@
                 <a:ea typeface="Calibri" pitchFamily="34" charset="-122"/>
                 <a:cs typeface="Calibri" pitchFamily="34" charset="-120"/>
               </a:rPr>
-              <a:t>Stacks</a:t>
+              <a:t>A bar</a:t>
             </a:r>
             <a:endParaRPr lang="en-US" sz="2400" dirty="0"/>
           </a:p>
@@ -11575,7 +11575,7 @@
                 <a:ea typeface="Calibri" pitchFamily="34" charset="-122"/>
                 <a:cs typeface="Calibri" pitchFamily="34" charset="-120"/>
               </a:rPr>
-              <a:t>A spit</a:t>
+              <a:t>Stacks</a:t>
             </a:r>
             <a:endParaRPr lang="en-US" sz="2400" dirty="0"/>
           </a:p>
@@ -11612,7 +11612,7 @@
                 <a:ea typeface="Calibri" pitchFamily="34" charset="-122"/>
                 <a:cs typeface="Calibri" pitchFamily="34" charset="-120"/>
               </a:rPr>
-              <a:t>A bar</a:t>
+              <a:t>Sand dunes</a:t>
             </a:r>
             <a:endParaRPr lang="en-US" sz="2400" dirty="0"/>
           </a:p>
@@ -11649,7 +11649,7 @@
                 <a:ea typeface="Calibri" pitchFamily="34" charset="-122"/>
                 <a:cs typeface="Calibri" pitchFamily="34" charset="-120"/>
               </a:rPr>
-              <a:t>Sand dunes</a:t>
+              <a:t>A spit</a:t>
             </a:r>
             <a:endParaRPr lang="en-US" sz="2400" dirty="0"/>
           </a:p>
@@ -12421,7 +12421,7 @@
                 <a:ea typeface="Calibri" pitchFamily="34" charset="-122"/>
                 <a:cs typeface="Calibri" pitchFamily="34" charset="-120"/>
               </a:rPr>
-              <a:t>A spit</a:t>
+              <a:t>Stacks</a:t>
             </a:r>
             <a:endParaRPr lang="en-US" sz="2400" dirty="0"/>
           </a:p>
@@ -12458,7 +12458,7 @@
                 <a:ea typeface="Calibri" pitchFamily="34" charset="-122"/>
                 <a:cs typeface="Calibri" pitchFamily="34" charset="-120"/>
               </a:rPr>
-              <a:t>A bar</a:t>
+              <a:t>Sand dunes</a:t>
             </a:r>
             <a:endParaRPr lang="en-US" sz="2400" dirty="0"/>
           </a:p>
@@ -12495,7 +12495,7 @@
                 <a:ea typeface="Calibri" pitchFamily="34" charset="-122"/>
                 <a:cs typeface="Calibri" pitchFamily="34" charset="-120"/>
               </a:rPr>
-              <a:t>Sand dunes</a:t>
+              <a:t>A spit</a:t>
             </a:r>
             <a:endParaRPr lang="en-US" sz="2400" dirty="0"/>
           </a:p>
@@ -12532,7 +12532,7 @@
                 <a:ea typeface="Calibri" pitchFamily="34" charset="-122"/>
                 <a:cs typeface="Calibri" pitchFamily="34" charset="-120"/>
               </a:rPr>
-              <a:t>Stacks</a:t>
+              <a:t>A bar</a:t>
             </a:r>
             <a:endParaRPr lang="en-US" sz="2400" dirty="0"/>
           </a:p>
@@ -14114,7 +14114,7 @@
                 <a:ea typeface="Cambria" pitchFamily="34" charset="-122"/>
                 <a:cs typeface="Cambria" pitchFamily="34" charset="-120"/>
               </a:rPr>
-              <a:t>D   Stacks</a:t>
+              <a:t>A   Stacks</a:t>
             </a:r>
             <a:endParaRPr lang="en-US" sz="1800" dirty="0"/>
           </a:p>
@@ -14635,7 +14635,7 @@
                 <a:ea typeface="Calibri" pitchFamily="34" charset="-122"/>
                 <a:cs typeface="Calibri" pitchFamily="34" charset="-120"/>
               </a:rPr>
-              <a:t>A   Stacks</a:t>
+              <a:t>B   Stacks</a:t>
             </a:r>
             <a:endParaRPr lang="en-US" sz="2200" dirty="0"/>
           </a:p>

--- a/decks/geog-landscapes/geog-landscapes_ch3_coastal-landforms.pptx
+++ b/decks/geog-landscapes/geog-landscapes_ch3_coastal-landforms.pptx
@@ -129,30 +129,30 @@
   <p:extLst>
     <p:ext uri="{521415D9-36F7-43E2-AB2F-B90AF26B5E84}">
       <p14:sectionLst xmlns:p14="http://schemas.microsoft.com/office/powerpoint/2010/main">
-        <p14:section name="Opening" id="{47d9c8f2-bef9-1f6a-62b9-a03a94b5a87e}">
+        <p14:section name="Opening" id="{49be431f-5fbe-921a-9287-863014ae2934}">
           <p14:sldIdLst>
             <p14:sldId id="256"/>
           </p14:sldIdLst>
         </p14:section>
-        <p14:section name="Gate" id="{2cb2e9ca-a070-4348-17a1-1b15e8e7ded6}">
+        <p14:section name="Gate" id="{5d5c3546-de0e-84f0-ff86-ae744c7e30eb}">
           <p14:sldIdLst>
             <p14:sldId id="257"/>
             <p14:sldId id="258"/>
           </p14:sldIdLst>
         </p14:section>
-        <p14:section name="Pre-teach" id="{860c03f6-7ac6-378b-b463-be4d622464ea}">
+        <p14:section name="Pre-teach" id="{a3682e08-9de3-67de-dd5a-9ceb65e2f23c}">
           <p14:sldIdLst>
             <p14:sldId id="259"/>
             <p14:sldId id="260"/>
           </p14:sldIdLst>
         </p14:section>
-        <p14:section name="Read-along" id="{fe08552d-8344-524e-cc9c-480ce5baa86e}">
+        <p14:section name="Read-along" id="{5c3f3c32-defe-15d9-296b-ff31e59c23b6}">
           <p14:sldIdLst>
             <p14:sldId id="261"/>
             <p14:sldId id="262"/>
           </p14:sldIdLst>
         </p14:section>
-        <p14:section name="Teach" id="{1080dfad-92f6-ce86-627c-172e1726812d}">
+        <p14:section name="Teach" id="{849e4faf-1bd3-4117-59b0-2195dcdbd055}">
           <p14:sldIdLst>
             <p14:sldId id="263"/>
             <p14:sldId id="264"/>
@@ -164,7 +164,7 @@
             <p14:sldId id="270"/>
           </p14:sldIdLst>
         </p14:section>
-        <p14:section name="Routes" id="{491306f2-57d3-db5b-f003-0ed1d1368d9c}">
+        <p14:section name="Routes" id="{0bce6c5a-97a5-3c6d-c93c-b87cff00afaa}">
           <p14:sldIdLst>
             <p14:sldId id="271"/>
             <p14:sldId id="272"/>
@@ -172,12 +172,12 @@
             <p14:sldId id="274"/>
           </p14:sldIdLst>
         </p14:section>
-        <p14:section name="Close" id="{76090fa1-5854-457a-9a46-45071e8c3586}">
+        <p14:section name="Close" id="{da68858b-6f0f-6a8b-ba90-e86868b18894}">
           <p14:sldIdLst>
             <p14:sldId id="275"/>
           </p14:sldIdLst>
         </p14:section>
-        <p14:section name="Answers" id="{a2f59d8a-a5ac-d683-e9b8-75569f84fbaa}">
+        <p14:section name="Answers" id="{3a190f25-2f45-3148-61c4-a41e8d074cdc}">
           <p14:sldIdLst>
             <p14:sldId id="276"/>
             <p14:sldId id="277"/>
